--- a/classes/parte-11-devsecops-y-seguridad-del-sdlc/248-cultura-devsecops-y-security-champions/clase-248-presentacion.pptx
+++ b/classes/parte-11-devsecops-y-seguridad-del-sdlc/248-cultura-devsecops-y-security-champions/clase-248-presentacion.pptx
@@ -17,6 +17,10 @@
     <p:sldId id="265" r:id="rId16"/>
     <p:sldId id="266" r:id="rId17"/>
     <p:sldId id="267" r:id="rId18"/>
+    <p:sldId id="268" r:id="rId19"/>
+    <p:sldId id="269" r:id="rId20"/>
+    <p:sldId id="270" r:id="rId21"/>
+    <p:sldId id="271" r:id="rId22"/>
   </p:sldIdLst>
   <p:sldSz cx="9144000" cy="6858000" type="screen4x3"/>
   <p:notesSz cx="6858000" cy="9144000"/>
@@ -3198,7 +3202,7 @@
                   <a:srgbClr val="0B3D2E"/>
                 </a:solidFill>
               </a:rPr>
-              <a:t>⚠️ Errores comunes</a:t>
+              <a:t>🧪 Laboratorio guiado</a:t>
             </a:r>
           </a:p>
         </p:txBody>
@@ -3236,67 +3240,97 @@
                   <a:srgbClr val="22282E"/>
                 </a:solidFill>
               </a:rPr>
-              <a:t>•  El programa de champions se apaga en meses — Sin tiempo protegido ni reconocimiento. Asigna % de tiempo formal e incentiva.</a:t>
-            </a:r>
-          </a:p>
-          <a:p>
-            <a:pPr>
-              <a:spcAft>
-                <a:spcPts val="600"/>
-              </a:spcAft>
-            </a:pPr>
-            <a:r>
-              <a:rPr sz="1500">
-                <a:solidFill>
-                  <a:srgbClr val="22282E"/>
-                </a:solidFill>
-              </a:rPr>
-              <a:t>•  Se nombran champions a dedo y no participan — Imposición en vez de voluntariedad. Selecciona por interés y motiva.</a:t>
-            </a:r>
-          </a:p>
-          <a:p>
-            <a:pPr>
-              <a:spcAft>
-                <a:spcPts val="600"/>
-              </a:spcAft>
-            </a:pPr>
-            <a:r>
-              <a:rPr sz="1500">
-                <a:solidFill>
-                  <a:srgbClr val="22282E"/>
-                </a:solidFill>
-              </a:rPr>
-              <a:t>•  AppSec sigue siendo el único que "hace" seguridad — No se delegó ownership. Usa hub-and-spoke y automatiza para habilitar, no ejecutar.</a:t>
-            </a:r>
-          </a:p>
-          <a:p>
-            <a:pPr>
-              <a:spcAft>
-                <a:spcPts val="600"/>
-              </a:spcAft>
-            </a:pPr>
-            <a:r>
-              <a:rPr sz="1500">
-                <a:solidFill>
-                  <a:srgbClr val="22282E"/>
-                </a:solidFill>
-              </a:rPr>
-              <a:t>•  Los incidentes se ocultan — Cultura de culpa. Adopta post-mortems blameless para que se reporte.</a:t>
-            </a:r>
-          </a:p>
-          <a:p>
-            <a:pPr>
-              <a:spcAft>
-                <a:spcPts val="600"/>
-              </a:spcAft>
-            </a:pPr>
-            <a:r>
-              <a:rPr sz="1500">
-                <a:solidFill>
-                  <a:srgbClr val="22282E"/>
-                </a:solidFill>
-              </a:rPr>
-              <a:t>•  "No podemos demostrar el valor del programa" — Falta de métricas. Mide cobertura, MTTR por equipo y madurez SAMM.</a:t>
+              <a:t>•  Diseño de un programa real (ejercicio aplicado, no ofensivo):</a:t>
+            </a:r>
+          </a:p>
+          <a:p>
+            <a:pPr>
+              <a:spcAft>
+                <a:spcPts val="600"/>
+              </a:spcAft>
+            </a:pPr>
+            <a:r>
+              <a:rPr sz="1500">
+                <a:solidFill>
+                  <a:srgbClr val="22282E"/>
+                </a:solidFill>
+              </a:rPr>
+              <a:t>•  Diagnostica la cultura actual. Haz una mini-encuesta a un equipo: ¿saben a quién acudir con dudas de seguridad? ¿la seguridad les frena o les ayuda? Anota el punto de partida.</a:t>
+            </a:r>
+          </a:p>
+          <a:p>
+            <a:pPr>
+              <a:spcAft>
+                <a:spcPts val="600"/>
+              </a:spcAft>
+            </a:pPr>
+            <a:r>
+              <a:rPr sz="1500">
+                <a:solidFill>
+                  <a:srgbClr val="22282E"/>
+                </a:solidFill>
+              </a:rPr>
+              <a:t>•  Define el charter del programa de champions. Documenta objetivo, criterios de selección (voluntariedad + interés, no imposición), tiempo asignado (p. ej. 10–20%), y responsabilidades (revisar threat…</a:t>
+            </a:r>
+          </a:p>
+          <a:p>
+            <a:pPr>
+              <a:spcAft>
+                <a:spcPts val="600"/>
+              </a:spcAft>
+            </a:pPr>
+            <a:r>
+              <a:rPr sz="1500">
+                <a:solidFill>
+                  <a:srgbClr val="22282E"/>
+                </a:solidFill>
+              </a:rPr>
+              <a:t>•  Diseña el modelo hub-and-spoke. Dibuja cómo el equipo central de AppSec habilita a los champions y estos multiplican en sus equipos. Define ritmos: reunión mensual de champions, canal de…</a:t>
+            </a:r>
+          </a:p>
+          <a:p>
+            <a:pPr>
+              <a:spcAft>
+                <a:spcPts val="600"/>
+              </a:spcAft>
+            </a:pPr>
+            <a:r>
+              <a:rPr sz="1500">
+                <a:solidFill>
+                  <a:srgbClr val="22282E"/>
+                </a:solidFill>
+              </a:rPr>
+              <a:t>•  Plan de formación. Programa un CTF interno con Juice Shop, katas de código seguro y una rotación de temas de esta parte (SAST, threat modeling, secretos).</a:t>
+            </a:r>
+          </a:p>
+          <a:p>
+            <a:pPr>
+              <a:spcAft>
+                <a:spcPts val="600"/>
+              </a:spcAft>
+            </a:pPr>
+            <a:r>
+              <a:rPr sz="1500">
+                <a:solidFill>
+                  <a:srgbClr val="22282E"/>
+                </a:solidFill>
+              </a:rPr>
+              <a:t>•  Incentivos y reconocimiento. Define cómo se reconoce a los champions (visibilidad, tiempo protegido, badges, impacto en carrera). Sin esto el programa se apaga.</a:t>
+            </a:r>
+          </a:p>
+          <a:p>
+            <a:pPr>
+              <a:spcAft>
+                <a:spcPts val="600"/>
+              </a:spcAft>
+            </a:pPr>
+            <a:r>
+              <a:rPr sz="1500">
+                <a:solidFill>
+                  <a:srgbClr val="22282E"/>
+                </a:solidFill>
+              </a:rPr>
+              <a:t>•  Blameless post-mortem. Redacta la plantilla y las reglas de un post-mortem sin culpa para incidentes de seguridad.</a:t>
             </a:r>
           </a:p>
         </p:txBody>
@@ -3347,7 +3381,7 @@
                   <a:srgbClr val="0B3D2E"/>
                 </a:solidFill>
               </a:rPr>
-              <a:t>❓ Preguntas frecuentes</a:t>
+              <a:t>✍️ Ejercicios</a:t>
             </a:r>
           </a:p>
         </p:txBody>
@@ -3385,97 +3419,82 @@
                   <a:srgbClr val="22282E"/>
                 </a:solidFill>
               </a:rPr>
-              <a:t>•  ❓ ¿Cuántos champions necesito?</a:t>
-            </a:r>
-          </a:p>
-          <a:p>
-            <a:pPr>
-              <a:spcAft>
-                <a:spcPts val="600"/>
-              </a:spcAft>
-            </a:pPr>
-            <a:r>
-              <a:rPr sz="1500">
-                <a:solidFill>
-                  <a:srgbClr val="22282E"/>
-                </a:solidFill>
-              </a:rPr>
-              <a:t>•  Una referencia común es al menos uno por equipo/squad. Lo importante es cobertura y actividad real, no el número absoluto.</a:t>
-            </a:r>
-          </a:p>
-          <a:p>
-            <a:pPr>
-              <a:spcAft>
-                <a:spcPts val="600"/>
-              </a:spcAft>
-            </a:pPr>
-            <a:r>
-              <a:rPr sz="1500">
-                <a:solidFill>
-                  <a:srgbClr val="22282E"/>
-                </a:solidFill>
-              </a:rPr>
-              <a:t>•  ❓ ¿Un champion debe ser experto en seguridad?</a:t>
-            </a:r>
-          </a:p>
-          <a:p>
-            <a:pPr>
-              <a:spcAft>
-                <a:spcPts val="600"/>
-              </a:spcAft>
-            </a:pPr>
-            <a:r>
-              <a:rPr sz="1500">
-                <a:solidFill>
-                  <a:srgbClr val="22282E"/>
-                </a:solidFill>
-              </a:rPr>
-              <a:t>•  No. Es un desarrollador con interés que hace de enlace y multiplicador; el equipo central de AppSec le da soporte y formación. La curiosidad importa más que la experticia inicial.</a:t>
-            </a:r>
-          </a:p>
-          <a:p>
-            <a:pPr>
-              <a:spcAft>
-                <a:spcPts val="600"/>
-              </a:spcAft>
-            </a:pPr>
-            <a:r>
-              <a:rPr sz="1500">
-                <a:solidFill>
-                  <a:srgbClr val="22282E"/>
-                </a:solidFill>
-              </a:rPr>
-              <a:t>•  ❓ ¿Cómo evito que DevSecOps se perciba como un freno?</a:t>
-            </a:r>
-          </a:p>
-          <a:p>
-            <a:pPr>
-              <a:spcAft>
-                <a:spcPts val="600"/>
-              </a:spcAft>
-            </a:pPr>
-            <a:r>
-              <a:rPr sz="1500">
-                <a:solidFill>
-                  <a:srgbClr val="22282E"/>
-                </a:solidFill>
-              </a:rPr>
-              <a:t>•  Automatizando controles en el pipeline, dando feedback rápido y accionable, y posicionando a seguridad como habilitador (guardrails) en vez de guardián que dice "no".</a:t>
-            </a:r>
-          </a:p>
-          <a:p>
-            <a:pPr>
-              <a:spcAft>
-                <a:spcPts val="600"/>
-              </a:spcAft>
-            </a:pPr>
-            <a:r>
-              <a:rPr sz="1500">
-                <a:solidFill>
-                  <a:srgbClr val="22282E"/>
-                </a:solidFill>
-              </a:rPr>
-              <a:t>•  ❓ ¿Cómo mido la cultura, que es intangible?</a:t>
+              <a:t>•  Redacta el charter de un programa de security champions de una página.</a:t>
+            </a:r>
+          </a:p>
+          <a:p>
+            <a:pPr>
+              <a:spcAft>
+                <a:spcPts val="600"/>
+              </a:spcAft>
+            </a:pPr>
+            <a:r>
+              <a:rPr sz="1500">
+                <a:solidFill>
+                  <a:srgbClr val="22282E"/>
+                </a:solidFill>
+              </a:rPr>
+              <a:t>•  Define criterios de selección de champions que eviten la imposición.</a:t>
+            </a:r>
+          </a:p>
+          <a:p>
+            <a:pPr>
+              <a:spcAft>
+                <a:spcPts val="600"/>
+              </a:spcAft>
+            </a:pPr>
+            <a:r>
+              <a:rPr sz="1500">
+                <a:solidFill>
+                  <a:srgbClr val="22282E"/>
+                </a:solidFill>
+              </a:rPr>
+              <a:t>•  Diseña la agenda de la primera reunión mensual de champions.</a:t>
+            </a:r>
+          </a:p>
+          <a:p>
+            <a:pPr>
+              <a:spcAft>
+                <a:spcPts val="600"/>
+              </a:spcAft>
+            </a:pPr>
+            <a:r>
+              <a:rPr sz="1500">
+                <a:solidFill>
+                  <a:srgbClr val="22282E"/>
+                </a:solidFill>
+              </a:rPr>
+              <a:t>•  Crea un plan de formación de 3 meses con temas de esta parte.</a:t>
+            </a:r>
+          </a:p>
+          <a:p>
+            <a:pPr>
+              <a:spcAft>
+                <a:spcPts val="600"/>
+              </a:spcAft>
+            </a:pPr>
+            <a:r>
+              <a:rPr sz="1500">
+                <a:solidFill>
+                  <a:srgbClr val="22282E"/>
+                </a:solidFill>
+              </a:rPr>
+              <a:t>•  Escribe la plantilla de un blameless post-mortem.</a:t>
+            </a:r>
+          </a:p>
+          <a:p>
+            <a:pPr>
+              <a:spcAft>
+                <a:spcPts val="600"/>
+              </a:spcAft>
+            </a:pPr>
+            <a:r>
+              <a:rPr sz="1500">
+                <a:solidFill>
+                  <a:srgbClr val="22282E"/>
+                </a:solidFill>
+              </a:rPr>
+              <a:t>•  Propón 5 métricas para demostrar el valor del programa a dirección.</a:t>
             </a:r>
           </a:p>
         </p:txBody>
@@ -3526,7 +3545,7 @@
                   <a:srgbClr val="0B3D2E"/>
                 </a:solidFill>
               </a:rPr>
-              <a:t>🔗 Referencias</a:t>
+              <a:t>📝 Reto verificable</a:t>
             </a:r>
           </a:p>
         </p:txBody>
@@ -3564,6 +3583,483 @@
                   <a:srgbClr val="22282E"/>
                 </a:solidFill>
               </a:rPr>
+              <a:t>•  Diseña un programa de security champions completo listo para presentar a dirección.</a:t>
+            </a:r>
+          </a:p>
+          <a:p>
+            <a:pPr>
+              <a:spcAft>
+                <a:spcPts val="600"/>
+              </a:spcAft>
+            </a:pPr>
+            <a:r>
+              <a:rPr sz="1500">
+                <a:solidFill>
+                  <a:srgbClr val="22282E"/>
+                </a:solidFill>
+              </a:rPr>
+              <a:t>•  Criterio de aceptación: el programa incluye (a) charter con objetivo, selección voluntaria</a:t>
+            </a:r>
+          </a:p>
+          <a:p>
+            <a:pPr>
+              <a:spcAft>
+                <a:spcPts val="600"/>
+              </a:spcAft>
+            </a:pPr>
+            <a:r>
+              <a:rPr sz="1500">
+                <a:solidFill>
+                  <a:srgbClr val="22282E"/>
+                </a:solidFill>
+              </a:rPr>
+              <a:t>•  y tiempo asignado; (b) modelo hub-and-spoke con ritmos de comunicación definidos; (c) plan de</a:t>
+            </a:r>
+          </a:p>
+          <a:p>
+            <a:pPr>
+              <a:spcAft>
+                <a:spcPts val="600"/>
+              </a:spcAft>
+            </a:pPr>
+            <a:r>
+              <a:rPr sz="1500">
+                <a:solidFill>
+                  <a:srgbClr val="22282E"/>
+                </a:solidFill>
+              </a:rPr>
+              <a:t>•  formación con actividad práctica (CTF/katas); (d) esquema de incentivos y reconocimiento</a:t>
+            </a:r>
+          </a:p>
+          <a:p>
+            <a:pPr>
+              <a:spcAft>
+                <a:spcPts val="600"/>
+              </a:spcAft>
+            </a:pPr>
+            <a:r>
+              <a:rPr sz="1500">
+                <a:solidFill>
+                  <a:srgbClr val="22282E"/>
+                </a:solidFill>
+              </a:rPr>
+              <a:t>•  concreto; y (e) un cuadro de 4–5 métricas para medir madurez y valor, alineadas con OWASP SAMM.</a:t>
+            </a:r>
+          </a:p>
+        </p:txBody>
+      </p:sp>
+    </p:spTree>
+  </p:cSld>
+  <p:clrMapOvr>
+    <a:masterClrMapping/>
+  </p:clrMapOvr>
+</p:sld>
+</file>
+
+<file path=ppt/slides/slide13.xml><?xml version="1.0" encoding="utf-8"?>
+<p:sld xmlns:a="http://schemas.openxmlformats.org/drawingml/2006/main" xmlns:p="http://schemas.openxmlformats.org/presentationml/2006/main" xmlns:r="http://schemas.openxmlformats.org/officeDocument/2006/relationships">
+  <p:cSld>
+    <p:spTree>
+      <p:nvGrpSpPr>
+        <p:cNvPr id="1" name=""/>
+        <p:cNvGrpSpPr/>
+        <p:nvPr/>
+      </p:nvGrpSpPr>
+      <p:grpSpPr/>
+      <p:sp>
+        <p:nvSpPr>
+          <p:cNvPr id="2" name="TextBox 1"/>
+          <p:cNvSpPr txBox="1"/>
+          <p:nvPr/>
+        </p:nvSpPr>
+        <p:spPr>
+          <a:xfrm>
+            <a:off x="457200" y="320040"/>
+            <a:ext cx="8229600" cy="822960"/>
+          </a:xfrm>
+          <a:prstGeom prst="rect">
+            <a:avLst/>
+          </a:prstGeom>
+          <a:noFill/>
+        </p:spPr>
+        <p:txBody>
+          <a:bodyPr wrap="square">
+            <a:spAutoFit/>
+          </a:bodyPr>
+          <a:lstStyle/>
+          <a:p>
+            <a:r>
+              <a:rPr sz="2600" b="1">
+                <a:solidFill>
+                  <a:srgbClr val="0B3D2E"/>
+                </a:solidFill>
+              </a:rPr>
+              <a:t>⚠️ Errores comunes</a:t>
+            </a:r>
+          </a:p>
+        </p:txBody>
+      </p:sp>
+      <p:sp>
+        <p:nvSpPr>
+          <p:cNvPr id="3" name="TextBox 2"/>
+          <p:cNvSpPr txBox="1"/>
+          <p:nvPr/>
+        </p:nvSpPr>
+        <p:spPr>
+          <a:xfrm>
+            <a:off x="457200" y="1280160"/>
+            <a:ext cx="8229600" cy="4937760"/>
+          </a:xfrm>
+          <a:prstGeom prst="rect">
+            <a:avLst/>
+          </a:prstGeom>
+          <a:noFill/>
+        </p:spPr>
+        <p:txBody>
+          <a:bodyPr wrap="square">
+            <a:spAutoFit/>
+          </a:bodyPr>
+          <a:lstStyle/>
+          <a:p>
+            <a:pPr>
+              <a:spcAft>
+                <a:spcPts val="600"/>
+              </a:spcAft>
+            </a:pPr>
+            <a:r>
+              <a:rPr sz="1500">
+                <a:solidFill>
+                  <a:srgbClr val="22282E"/>
+                </a:solidFill>
+              </a:rPr>
+              <a:t>•  El programa de champions se apaga en meses — Sin tiempo protegido ni reconocimiento. Asigna % de tiempo formal e incentiva.</a:t>
+            </a:r>
+          </a:p>
+          <a:p>
+            <a:pPr>
+              <a:spcAft>
+                <a:spcPts val="600"/>
+              </a:spcAft>
+            </a:pPr>
+            <a:r>
+              <a:rPr sz="1500">
+                <a:solidFill>
+                  <a:srgbClr val="22282E"/>
+                </a:solidFill>
+              </a:rPr>
+              <a:t>•  Se nombran champions a dedo y no participan — Imposición en vez de voluntariedad. Selecciona por interés y motiva.</a:t>
+            </a:r>
+          </a:p>
+          <a:p>
+            <a:pPr>
+              <a:spcAft>
+                <a:spcPts val="600"/>
+              </a:spcAft>
+            </a:pPr>
+            <a:r>
+              <a:rPr sz="1500">
+                <a:solidFill>
+                  <a:srgbClr val="22282E"/>
+                </a:solidFill>
+              </a:rPr>
+              <a:t>•  AppSec sigue siendo el único que "hace" seguridad — No se delegó ownership. Usa hub-and-spoke y automatiza para habilitar, no ejecutar.</a:t>
+            </a:r>
+          </a:p>
+          <a:p>
+            <a:pPr>
+              <a:spcAft>
+                <a:spcPts val="600"/>
+              </a:spcAft>
+            </a:pPr>
+            <a:r>
+              <a:rPr sz="1500">
+                <a:solidFill>
+                  <a:srgbClr val="22282E"/>
+                </a:solidFill>
+              </a:rPr>
+              <a:t>•  Los incidentes se ocultan — Cultura de culpa. Adopta post-mortems blameless para que se reporte.</a:t>
+            </a:r>
+          </a:p>
+          <a:p>
+            <a:pPr>
+              <a:spcAft>
+                <a:spcPts val="600"/>
+              </a:spcAft>
+            </a:pPr>
+            <a:r>
+              <a:rPr sz="1500">
+                <a:solidFill>
+                  <a:srgbClr val="22282E"/>
+                </a:solidFill>
+              </a:rPr>
+              <a:t>•  "No podemos demostrar el valor del programa" — Falta de métricas. Mide cobertura, MTTR por equipo y madurez SAMM.</a:t>
+            </a:r>
+          </a:p>
+        </p:txBody>
+      </p:sp>
+    </p:spTree>
+  </p:cSld>
+  <p:clrMapOvr>
+    <a:masterClrMapping/>
+  </p:clrMapOvr>
+</p:sld>
+</file>
+
+<file path=ppt/slides/slide14.xml><?xml version="1.0" encoding="utf-8"?>
+<p:sld xmlns:a="http://schemas.openxmlformats.org/drawingml/2006/main" xmlns:p="http://schemas.openxmlformats.org/presentationml/2006/main" xmlns:r="http://schemas.openxmlformats.org/officeDocument/2006/relationships">
+  <p:cSld>
+    <p:spTree>
+      <p:nvGrpSpPr>
+        <p:cNvPr id="1" name=""/>
+        <p:cNvGrpSpPr/>
+        <p:nvPr/>
+      </p:nvGrpSpPr>
+      <p:grpSpPr/>
+      <p:sp>
+        <p:nvSpPr>
+          <p:cNvPr id="2" name="TextBox 1"/>
+          <p:cNvSpPr txBox="1"/>
+          <p:nvPr/>
+        </p:nvSpPr>
+        <p:spPr>
+          <a:xfrm>
+            <a:off x="457200" y="320040"/>
+            <a:ext cx="8229600" cy="822960"/>
+          </a:xfrm>
+          <a:prstGeom prst="rect">
+            <a:avLst/>
+          </a:prstGeom>
+          <a:noFill/>
+        </p:spPr>
+        <p:txBody>
+          <a:bodyPr wrap="square">
+            <a:spAutoFit/>
+          </a:bodyPr>
+          <a:lstStyle/>
+          <a:p>
+            <a:r>
+              <a:rPr sz="2600" b="1">
+                <a:solidFill>
+                  <a:srgbClr val="0B3D2E"/>
+                </a:solidFill>
+              </a:rPr>
+              <a:t>❓ Preguntas frecuentes</a:t>
+            </a:r>
+          </a:p>
+        </p:txBody>
+      </p:sp>
+      <p:sp>
+        <p:nvSpPr>
+          <p:cNvPr id="3" name="TextBox 2"/>
+          <p:cNvSpPr txBox="1"/>
+          <p:nvPr/>
+        </p:nvSpPr>
+        <p:spPr>
+          <a:xfrm>
+            <a:off x="457200" y="1280160"/>
+            <a:ext cx="8229600" cy="4937760"/>
+          </a:xfrm>
+          <a:prstGeom prst="rect">
+            <a:avLst/>
+          </a:prstGeom>
+          <a:noFill/>
+        </p:spPr>
+        <p:txBody>
+          <a:bodyPr wrap="square">
+            <a:spAutoFit/>
+          </a:bodyPr>
+          <a:lstStyle/>
+          <a:p>
+            <a:pPr>
+              <a:spcAft>
+                <a:spcPts val="600"/>
+              </a:spcAft>
+            </a:pPr>
+            <a:r>
+              <a:rPr sz="1500">
+                <a:solidFill>
+                  <a:srgbClr val="22282E"/>
+                </a:solidFill>
+              </a:rPr>
+              <a:t>•  ❓ ¿Cuántos champions necesito?</a:t>
+            </a:r>
+          </a:p>
+          <a:p>
+            <a:pPr>
+              <a:spcAft>
+                <a:spcPts val="600"/>
+              </a:spcAft>
+            </a:pPr>
+            <a:r>
+              <a:rPr sz="1500">
+                <a:solidFill>
+                  <a:srgbClr val="22282E"/>
+                </a:solidFill>
+              </a:rPr>
+              <a:t>•  Una referencia común es al menos uno por equipo/squad. Lo importante es cobertura y actividad real, no el número absoluto.</a:t>
+            </a:r>
+          </a:p>
+          <a:p>
+            <a:pPr>
+              <a:spcAft>
+                <a:spcPts val="600"/>
+              </a:spcAft>
+            </a:pPr>
+            <a:r>
+              <a:rPr sz="1500">
+                <a:solidFill>
+                  <a:srgbClr val="22282E"/>
+                </a:solidFill>
+              </a:rPr>
+              <a:t>•  ❓ ¿Un champion debe ser experto en seguridad?</a:t>
+            </a:r>
+          </a:p>
+          <a:p>
+            <a:pPr>
+              <a:spcAft>
+                <a:spcPts val="600"/>
+              </a:spcAft>
+            </a:pPr>
+            <a:r>
+              <a:rPr sz="1500">
+                <a:solidFill>
+                  <a:srgbClr val="22282E"/>
+                </a:solidFill>
+              </a:rPr>
+              <a:t>•  No. Es un desarrollador con interés que hace de enlace y multiplicador; el equipo central de AppSec le da soporte y formación. La curiosidad importa más que la experticia inicial.</a:t>
+            </a:r>
+          </a:p>
+          <a:p>
+            <a:pPr>
+              <a:spcAft>
+                <a:spcPts val="600"/>
+              </a:spcAft>
+            </a:pPr>
+            <a:r>
+              <a:rPr sz="1500">
+                <a:solidFill>
+                  <a:srgbClr val="22282E"/>
+                </a:solidFill>
+              </a:rPr>
+              <a:t>•  ❓ ¿Cómo evito que DevSecOps se perciba como un freno?</a:t>
+            </a:r>
+          </a:p>
+          <a:p>
+            <a:pPr>
+              <a:spcAft>
+                <a:spcPts val="600"/>
+              </a:spcAft>
+            </a:pPr>
+            <a:r>
+              <a:rPr sz="1500">
+                <a:solidFill>
+                  <a:srgbClr val="22282E"/>
+                </a:solidFill>
+              </a:rPr>
+              <a:t>•  Automatizando controles en el pipeline, dando feedback rápido y accionable, y posicionando a seguridad como habilitador (guardrails) en vez de guardián que dice "no".</a:t>
+            </a:r>
+          </a:p>
+          <a:p>
+            <a:pPr>
+              <a:spcAft>
+                <a:spcPts val="600"/>
+              </a:spcAft>
+            </a:pPr>
+            <a:r>
+              <a:rPr sz="1500">
+                <a:solidFill>
+                  <a:srgbClr val="22282E"/>
+                </a:solidFill>
+              </a:rPr>
+              <a:t>•  ❓ ¿Cómo mido la cultura, que es intangible?</a:t>
+            </a:r>
+          </a:p>
+        </p:txBody>
+      </p:sp>
+    </p:spTree>
+  </p:cSld>
+  <p:clrMapOvr>
+    <a:masterClrMapping/>
+  </p:clrMapOvr>
+</p:sld>
+</file>
+
+<file path=ppt/slides/slide15.xml><?xml version="1.0" encoding="utf-8"?>
+<p:sld xmlns:a="http://schemas.openxmlformats.org/drawingml/2006/main" xmlns:p="http://schemas.openxmlformats.org/presentationml/2006/main" xmlns:r="http://schemas.openxmlformats.org/officeDocument/2006/relationships">
+  <p:cSld>
+    <p:spTree>
+      <p:nvGrpSpPr>
+        <p:cNvPr id="1" name=""/>
+        <p:cNvGrpSpPr/>
+        <p:nvPr/>
+      </p:nvGrpSpPr>
+      <p:grpSpPr/>
+      <p:sp>
+        <p:nvSpPr>
+          <p:cNvPr id="2" name="TextBox 1"/>
+          <p:cNvSpPr txBox="1"/>
+          <p:nvPr/>
+        </p:nvSpPr>
+        <p:spPr>
+          <a:xfrm>
+            <a:off x="457200" y="320040"/>
+            <a:ext cx="8229600" cy="822960"/>
+          </a:xfrm>
+          <a:prstGeom prst="rect">
+            <a:avLst/>
+          </a:prstGeom>
+          <a:noFill/>
+        </p:spPr>
+        <p:txBody>
+          <a:bodyPr wrap="square">
+            <a:spAutoFit/>
+          </a:bodyPr>
+          <a:lstStyle/>
+          <a:p>
+            <a:r>
+              <a:rPr sz="2600" b="1">
+                <a:solidFill>
+                  <a:srgbClr val="0B3D2E"/>
+                </a:solidFill>
+              </a:rPr>
+              <a:t>🔗 Referencias</a:t>
+            </a:r>
+          </a:p>
+        </p:txBody>
+      </p:sp>
+      <p:sp>
+        <p:nvSpPr>
+          <p:cNvPr id="3" name="TextBox 2"/>
+          <p:cNvSpPr txBox="1"/>
+          <p:nvPr/>
+        </p:nvSpPr>
+        <p:spPr>
+          <a:xfrm>
+            <a:off x="457200" y="1280160"/>
+            <a:ext cx="8229600" cy="4937760"/>
+          </a:xfrm>
+          <a:prstGeom prst="rect">
+            <a:avLst/>
+          </a:prstGeom>
+          <a:noFill/>
+        </p:spPr>
+        <p:txBody>
+          <a:bodyPr wrap="square">
+            <a:spAutoFit/>
+          </a:bodyPr>
+          <a:lstStyle/>
+          <a:p>
+            <a:pPr>
+              <a:spcAft>
+                <a:spcPts val="600"/>
+              </a:spcAft>
+            </a:pPr>
+            <a:r>
+              <a:rPr sz="1500">
+                <a:solidFill>
+                  <a:srgbClr val="22282E"/>
+                </a:solidFill>
+              </a:rPr>
               <a:t>•  OWASP Security Champions Guide — &lt;https://owasp.org/www-project-security-champions-guidebook/&gt;</a:t>
             </a:r>
           </a:p>
@@ -3629,6 +4125,81 @@
           </a:p>
         </p:txBody>
       </p:sp>
+    </p:spTree>
+  </p:cSld>
+  <p:clrMapOvr>
+    <a:masterClrMapping/>
+  </p:clrMapOvr>
+</p:sld>
+</file>
+
+<file path=ppt/slides/slide16.xml><?xml version="1.0" encoding="utf-8"?>
+<p:sld xmlns:a="http://schemas.openxmlformats.org/drawingml/2006/main" xmlns:p="http://schemas.openxmlformats.org/presentationml/2006/main" xmlns:r="http://schemas.openxmlformats.org/officeDocument/2006/relationships">
+  <p:cSld>
+    <p:spTree>
+      <p:nvGrpSpPr>
+        <p:cNvPr id="1" name=""/>
+        <p:cNvGrpSpPr/>
+        <p:nvPr/>
+      </p:nvGrpSpPr>
+      <p:grpSpPr/>
+      <p:sp>
+        <p:nvSpPr>
+          <p:cNvPr id="2" name="TextBox 1"/>
+          <p:cNvSpPr txBox="1"/>
+          <p:nvPr/>
+        </p:nvSpPr>
+        <p:spPr>
+          <a:xfrm>
+            <a:off x="457200" y="274320"/>
+            <a:ext cx="8229600" cy="640080"/>
+          </a:xfrm>
+          <a:prstGeom prst="rect">
+            <a:avLst/>
+          </a:prstGeom>
+          <a:noFill/>
+        </p:spPr>
+        <p:txBody>
+          <a:bodyPr wrap="square">
+            <a:spAutoFit/>
+          </a:bodyPr>
+          <a:lstStyle/>
+          <a:p>
+            <a:r>
+              <a:rPr sz="2200" b="1">
+                <a:solidFill>
+                  <a:srgbClr val="0B3D2E"/>
+                </a:solidFill>
+              </a:rPr>
+              <a:t>Diagrama de la clase</a:t>
+            </a:r>
+          </a:p>
+        </p:txBody>
+      </p:sp>
+      <p:pic>
+        <p:nvPicPr>
+          <p:cNvPr id="3" name="Picture 2" descr="ee7559b2322176ab.png"/>
+          <p:cNvPicPr>
+            <a:picLocks noChangeAspect="1"/>
+          </p:cNvPicPr>
+          <p:nvPr/>
+        </p:nvPicPr>
+        <p:blipFill>
+          <a:blip r:embed="rId2"/>
+          <a:stretch>
+            <a:fillRect/>
+          </a:stretch>
+        </p:blipFill>
+        <p:spPr>
+          <a:xfrm>
+            <a:off x="1419048" y="1097280"/>
+            <a:ext cx="6305903" cy="5303520"/>
+          </a:xfrm>
+          <a:prstGeom prst="rect">
+            <a:avLst/>
+          </a:prstGeom>
+        </p:spPr>
+      </p:pic>
     </p:spTree>
   </p:cSld>
   <p:clrMapOvr>
@@ -4167,7 +4738,7 @@
                   <a:srgbClr val="0B3D2E"/>
                 </a:solidFill>
               </a:rPr>
-              <a:t>📖 Definiciones y características</a:t>
+              <a:t>🧠 Explicación en profundidad</a:t>
             </a:r>
           </a:p>
         </p:txBody>
@@ -4205,82 +4776,82 @@
                   <a:srgbClr val="22282E"/>
                 </a:solidFill>
               </a:rPr>
-              <a:t>•  Security champion: desarrollador de un equipo que actúa como enlace y referente de seguridad. Característica: no es experto full-time; es un multiplicador dentro de su equipo.</a:t>
-            </a:r>
-          </a:p>
-          <a:p>
-            <a:pPr>
-              <a:spcAft>
-                <a:spcPts val="600"/>
-              </a:spcAft>
-            </a:pPr>
-            <a:r>
-              <a:rPr sz="1500">
-                <a:solidFill>
-                  <a:srgbClr val="22282E"/>
-                </a:solidFill>
-              </a:rPr>
-              <a:t>•  Modelo hub-and-spoke: equipo central de AppSec (hub) conectado a champions distribuidos (spokes). Característica: escala el conocimiento sin centralizar la ejecución.</a:t>
-            </a:r>
-          </a:p>
-          <a:p>
-            <a:pPr>
-              <a:spcAft>
-                <a:spcPts val="600"/>
-              </a:spcAft>
-            </a:pPr>
-            <a:r>
-              <a:rPr sz="1500">
-                <a:solidFill>
-                  <a:srgbClr val="22282E"/>
-                </a:solidFill>
-              </a:rPr>
-              <a:t>•  Blameless post-mortem: análisis de incidentes centrado en el sistema, no en culpables. Característica: fomenta reportar en vez de ocultar.</a:t>
-            </a:r>
-          </a:p>
-          <a:p>
-            <a:pPr>
-              <a:spcAft>
-                <a:spcPts val="600"/>
-              </a:spcAft>
-            </a:pPr>
-            <a:r>
-              <a:rPr sz="1500">
-                <a:solidFill>
-                  <a:srgbClr val="22282E"/>
-                </a:solidFill>
-              </a:rPr>
-              <a:t>•  Cuello de botella de AppSec: el equipo de seguridad como único ejecutor y aprobador. Característica: frena entregas; se resuelve delegando y automatizando.</a:t>
-            </a:r>
-          </a:p>
-          <a:p>
-            <a:pPr>
-              <a:spcAft>
-                <a:spcPts val="600"/>
-              </a:spcAft>
-            </a:pPr>
-            <a:r>
-              <a:rPr sz="1500">
-                <a:solidFill>
-                  <a:srgbClr val="22282E"/>
-                </a:solidFill>
-              </a:rPr>
-              <a:t>•  Gamificación: usar mecánicas de juego (puntos, retos, ligas) para formar. Característica: sostiene el interés en la práctica de seguridad.</a:t>
-            </a:r>
-          </a:p>
-          <a:p>
-            <a:pPr>
-              <a:spcAft>
-                <a:spcPts val="600"/>
-              </a:spcAft>
-            </a:pPr>
-            <a:r>
-              <a:rPr sz="1500">
-                <a:solidFill>
-                  <a:srgbClr val="22282E"/>
-                </a:solidFill>
-              </a:rPr>
-              <a:t>•  Madurez cultural: grado en que la seguridad es responsabilidad compartida y natural. Característica: medible con SAMM y encuestas.</a:t>
+              <a:t>•  Decir que «la seguridad es responsabilidad de todos» puede diluirla si nadie tiene autoridad, tiempo o apoyo. Un modelo operativo sano asigna al equipo de producto la seguridad cotidiana de su…</a:t>
+            </a:r>
+          </a:p>
+          <a:p>
+            <a:pPr>
+              <a:spcAft>
+                <a:spcPts val="600"/>
+              </a:spcAft>
+            </a:pPr>
+            <a:r>
+              <a:rPr sz="1500">
+                <a:solidFill>
+                  <a:srgbClr val="22282E"/>
+                </a:solidFill>
+              </a:rPr>
+              <a:t>•  El diagrama muestra que el champion es un enlace bidireccional. Traduce riesgos al contexto del producto, recoge fricción de los controles, facilita modelado y ayuda a encontrar al experto adecuado.…</a:t>
+            </a:r>
+          </a:p>
+          <a:p>
+            <a:pPr>
+              <a:spcAft>
+                <a:spcPts val="600"/>
+              </a:spcAft>
+            </a:pPr>
+            <a:r>
+              <a:rPr sz="1500">
+                <a:solidFill>
+                  <a:srgbClr val="22282E"/>
+                </a:solidFill>
+              </a:rPr>
+              <a:t>•  Un paved road es una ruta mantenida que hace fácil la opción segura: plantilla de servicio con autenticación, logs, pipeline fijado, SBOM y despliegue protegido. No debe ser una cárcel; los equipos…</a:t>
+            </a:r>
+          </a:p>
+          <a:p>
+            <a:pPr>
+              <a:spcAft>
+                <a:spcPts val="600"/>
+              </a:spcAft>
+            </a:pPr>
+            <a:r>
+              <a:rPr sz="1500">
+                <a:solidFill>
+                  <a:srgbClr val="22282E"/>
+                </a:solidFill>
+              </a:rPr>
+              <a:t>•  La formación efectiva se conecta con trabajo real: sesiones breves sobre cambios actuales, laboratorios seguros, revisión de incidentes y acompañamiento. Completar cursos es una entrada, no un…</a:t>
+            </a:r>
+          </a:p>
+          <a:p>
+            <a:pPr>
+              <a:spcAft>
+                <a:spcPts val="600"/>
+              </a:spcAft>
+            </a:pPr>
+            <a:r>
+              <a:rPr sz="1500">
+                <a:solidFill>
+                  <a:srgbClr val="22282E"/>
+                </a:solidFill>
+              </a:rPr>
+              <a:t>•  Una revisión sin culpa no significa ausencia de responsabilidad. Se separa el error humano del diseño del sistema, se reconstruyen incentivos y barreras y se asignan acciones verificables. Si…</a:t>
+            </a:r>
+          </a:p>
+          <a:p>
+            <a:pPr>
+              <a:spcAft>
+                <a:spcPts val="600"/>
+              </a:spcAft>
+            </a:pPr>
+            <a:r>
+              <a:rPr sz="1500">
+                <a:solidFill>
+                  <a:srgbClr val="22282E"/>
+                </a:solidFill>
+              </a:rPr>
+              <a:t>•  Un equipo exige que su champion apruebe cada pull request. Al ausentarse, las entregas se detienen y los demás dejan de aprender. Se redefine el rol: las reglas repetibles pasan a plantillas y CI…</a:t>
             </a:r>
           </a:p>
         </p:txBody>
@@ -4331,7 +4902,7 @@
                   <a:srgbClr val="0B3D2E"/>
                 </a:solidFill>
               </a:rPr>
-              <a:t>🧰 Herramientas y preparación</a:t>
+              <a:t>📔 Glosario operativo</a:t>
             </a:r>
           </a:p>
         </p:txBody>
@@ -4369,67 +4940,82 @@
                   <a:srgbClr val="22282E"/>
                 </a:solidFill>
               </a:rPr>
-              <a:t>•  Clase organizativa; el "laboratorio" es de diseño de programa. Recursos útiles:</a:t>
-            </a:r>
-          </a:p>
-          <a:p>
-            <a:pPr>
-              <a:spcAft>
-                <a:spcPts val="600"/>
-              </a:spcAft>
-            </a:pPr>
-            <a:r>
-              <a:rPr sz="1500">
-                <a:solidFill>
-                  <a:srgbClr val="22282E"/>
-                </a:solidFill>
-              </a:rPr>
-              <a:t>•  OWASP Security Champions Guide y OWASP SAMM (práctica "Education &amp; Guidance").</a:t>
-            </a:r>
-          </a:p>
-          <a:p>
-            <a:pPr>
-              <a:spcAft>
-                <a:spcPts val="600"/>
-              </a:spcAft>
-            </a:pPr>
-            <a:r>
-              <a:rPr sz="1500">
-                <a:solidFill>
-                  <a:srgbClr val="22282E"/>
-                </a:solidFill>
-              </a:rPr>
-              <a:t>•  Plataformas de formación práctica: OWASP Juice Shop para CTF internos, Secure Code Warrior o katas de seguridad.</a:t>
-            </a:r>
-          </a:p>
-          <a:p>
-            <a:pPr>
-              <a:spcAft>
-                <a:spcPts val="600"/>
-              </a:spcAft>
-            </a:pPr>
-            <a:r>
-              <a:rPr sz="1500">
-                <a:solidFill>
-                  <a:srgbClr val="22282E"/>
-                </a:solidFill>
-              </a:rPr>
-              <a:t>•  Una plantilla de charter de programa (objetivos, roles, tiempo asignado, métricas).</a:t>
-            </a:r>
-          </a:p>
-          <a:p>
-            <a:pPr>
-              <a:spcAft>
-                <a:spcPts val="600"/>
-              </a:spcAft>
-            </a:pPr>
-            <a:r>
-              <a:rPr sz="1500">
-                <a:solidFill>
-                  <a:srgbClr val="22282E"/>
-                </a:solidFill>
-              </a:rPr>
-              <a:t>•  Herramienta de encuesta para medir percepción de seguridad en los equipos.</a:t>
+              <a:t>•  Término — Definición útil</a:t>
+            </a:r>
+          </a:p>
+          <a:p>
+            <a:pPr>
+              <a:spcAft>
+                <a:spcPts val="600"/>
+              </a:spcAft>
+            </a:pPr>
+            <a:r>
+              <a:rPr sz="1500">
+                <a:solidFill>
+                  <a:srgbClr val="22282E"/>
+                </a:solidFill>
+              </a:rPr>
+              <a:t>•  Security champion — Miembro del equipo que facilita prácticas y conexión con especialistas.</a:t>
+            </a:r>
+          </a:p>
+          <a:p>
+            <a:pPr>
+              <a:spcAft>
+                <a:spcPts val="600"/>
+              </a:spcAft>
+            </a:pPr>
+            <a:r>
+              <a:rPr sz="1500">
+                <a:solidFill>
+                  <a:srgbClr val="22282E"/>
+                </a:solidFill>
+              </a:rPr>
+              <a:t>•  Paved road — Camino de desarrollo mantenido con controles seguros por defecto.</a:t>
+            </a:r>
+          </a:p>
+          <a:p>
+            <a:pPr>
+              <a:spcAft>
+                <a:spcPts val="600"/>
+              </a:spcAft>
+            </a:pPr>
+            <a:r>
+              <a:rPr sz="1500">
+                <a:solidFill>
+                  <a:srgbClr val="22282E"/>
+                </a:solidFill>
+              </a:rPr>
+              <a:t>•  Ownership — Autoridad y obligación explícitas sobre decisiones y resultados.</a:t>
+            </a:r>
+          </a:p>
+          <a:p>
+            <a:pPr>
+              <a:spcAft>
+                <a:spcPts val="600"/>
+              </a:spcAft>
+            </a:pPr>
+            <a:r>
+              <a:rPr sz="1500">
+                <a:solidFill>
+                  <a:srgbClr val="22282E"/>
+                </a:solidFill>
+              </a:rPr>
+              <a:t>•  Seguridad psicológica — Posibilidad de informar problemas temprano sin represalia improductiva.</a:t>
+            </a:r>
+          </a:p>
+          <a:p>
+            <a:pPr>
+              <a:spcAft>
+                <a:spcPts val="600"/>
+              </a:spcAft>
+            </a:pPr>
+            <a:r>
+              <a:rPr sz="1500">
+                <a:solidFill>
+                  <a:srgbClr val="22282E"/>
+                </a:solidFill>
+              </a:rPr>
+              <a:t>•  Métrica de resultado — Señal del cambio de riesgo o comportamiento, no mera actividad.</a:t>
             </a:r>
           </a:p>
         </p:txBody>
@@ -4480,7 +5066,7 @@
                   <a:srgbClr val="0B3D2E"/>
                 </a:solidFill>
               </a:rPr>
-              <a:t>🧪 Laboratorio guiado</a:t>
+              <a:t>✅ Criterio de dominio</a:t>
             </a:r>
           </a:p>
         </p:txBody>
@@ -4518,97 +5104,7 @@
                   <a:srgbClr val="22282E"/>
                 </a:solidFill>
               </a:rPr>
-              <a:t>•  Diseño de un programa real (ejercicio aplicado, no ofensivo):</a:t>
-            </a:r>
-          </a:p>
-          <a:p>
-            <a:pPr>
-              <a:spcAft>
-                <a:spcPts val="600"/>
-              </a:spcAft>
-            </a:pPr>
-            <a:r>
-              <a:rPr sz="1500">
-                <a:solidFill>
-                  <a:srgbClr val="22282E"/>
-                </a:solidFill>
-              </a:rPr>
-              <a:t>•  Diagnostica la cultura actual. Haz una mini-encuesta a un equipo: ¿saben a quién acudir con dudas de seguridad? ¿la seguridad les frena o les ayuda? Anota el punto de partida.</a:t>
-            </a:r>
-          </a:p>
-          <a:p>
-            <a:pPr>
-              <a:spcAft>
-                <a:spcPts val="600"/>
-              </a:spcAft>
-            </a:pPr>
-            <a:r>
-              <a:rPr sz="1500">
-                <a:solidFill>
-                  <a:srgbClr val="22282E"/>
-                </a:solidFill>
-              </a:rPr>
-              <a:t>•  Define el charter del programa de champions. Documenta objetivo, criterios de selección (voluntariedad + interés, no imposición), tiempo asignado (p. ej. 10–20%), y responsabilidades (revisar threat models, difundir prácticas, ser enlace con AppSec).</a:t>
-            </a:r>
-          </a:p>
-          <a:p>
-            <a:pPr>
-              <a:spcAft>
-                <a:spcPts val="600"/>
-              </a:spcAft>
-            </a:pPr>
-            <a:r>
-              <a:rPr sz="1500">
-                <a:solidFill>
-                  <a:srgbClr val="22282E"/>
-                </a:solidFill>
-              </a:rPr>
-              <a:t>•  Diseña el modelo hub-and-spoke. Dibuja cómo el equipo central de AppSec habilita a los champions y estos multiplican en sus equipos. Define ritmos: reunión mensual de champions, canal de comunicación, office hours de AppSec.</a:t>
-            </a:r>
-          </a:p>
-          <a:p>
-            <a:pPr>
-              <a:spcAft>
-                <a:spcPts val="600"/>
-              </a:spcAft>
-            </a:pPr>
-            <a:r>
-              <a:rPr sz="1500">
-                <a:solidFill>
-                  <a:srgbClr val="22282E"/>
-                </a:solidFill>
-              </a:rPr>
-              <a:t>•  Plan de formación. Programa un CTF interno con Juice Shop, katas de código seguro y una rotación de temas de esta parte (SAST, threat modeling, secretos).</a:t>
-            </a:r>
-          </a:p>
-          <a:p>
-            <a:pPr>
-              <a:spcAft>
-                <a:spcPts val="600"/>
-              </a:spcAft>
-            </a:pPr>
-            <a:r>
-              <a:rPr sz="1500">
-                <a:solidFill>
-                  <a:srgbClr val="22282E"/>
-                </a:solidFill>
-              </a:rPr>
-              <a:t>•  Incentivos y reconocimiento. Define cómo se reconoce a los champions (visibilidad, tiempo protegido, badges, impacto en carrera). Sin esto el programa se apaga.</a:t>
-            </a:r>
-          </a:p>
-          <a:p>
-            <a:pPr>
-              <a:spcAft>
-                <a:spcPts val="600"/>
-              </a:spcAft>
-            </a:pPr>
-            <a:r>
-              <a:rPr sz="1500">
-                <a:solidFill>
-                  <a:srgbClr val="22282E"/>
-                </a:solidFill>
-              </a:rPr>
-              <a:t>•  Blameless post-mortem. Redacta la plantilla y las reglas de un post-mortem sin culpa para incidentes de seguridad.</a:t>
+              <a:t>•  Existe dominio cuando el alumno diseña un programa con mandato, tiempo, formación, comunidad, escalamiento y métricas; delimita responsabilidades; y evita convertir al champion en policía…</a:t>
             </a:r>
           </a:p>
         </p:txBody>
@@ -4659,7 +5155,7 @@
                   <a:srgbClr val="0B3D2E"/>
                 </a:solidFill>
               </a:rPr>
-              <a:t>✍️ Ejercicios</a:t>
+              <a:t>📖 Definiciones y características</a:t>
             </a:r>
           </a:p>
         </p:txBody>
@@ -4697,82 +5193,82 @@
                   <a:srgbClr val="22282E"/>
                 </a:solidFill>
               </a:rPr>
-              <a:t>•  Redacta el charter de un programa de security champions de una página.</a:t>
-            </a:r>
-          </a:p>
-          <a:p>
-            <a:pPr>
-              <a:spcAft>
-                <a:spcPts val="600"/>
-              </a:spcAft>
-            </a:pPr>
-            <a:r>
-              <a:rPr sz="1500">
-                <a:solidFill>
-                  <a:srgbClr val="22282E"/>
-                </a:solidFill>
-              </a:rPr>
-              <a:t>•  Define criterios de selección de champions que eviten la imposición.</a:t>
-            </a:r>
-          </a:p>
-          <a:p>
-            <a:pPr>
-              <a:spcAft>
-                <a:spcPts val="600"/>
-              </a:spcAft>
-            </a:pPr>
-            <a:r>
-              <a:rPr sz="1500">
-                <a:solidFill>
-                  <a:srgbClr val="22282E"/>
-                </a:solidFill>
-              </a:rPr>
-              <a:t>•  Diseña la agenda de la primera reunión mensual de champions.</a:t>
-            </a:r>
-          </a:p>
-          <a:p>
-            <a:pPr>
-              <a:spcAft>
-                <a:spcPts val="600"/>
-              </a:spcAft>
-            </a:pPr>
-            <a:r>
-              <a:rPr sz="1500">
-                <a:solidFill>
-                  <a:srgbClr val="22282E"/>
-                </a:solidFill>
-              </a:rPr>
-              <a:t>•  Crea un plan de formación de 3 meses con temas de esta parte.</a:t>
-            </a:r>
-          </a:p>
-          <a:p>
-            <a:pPr>
-              <a:spcAft>
-                <a:spcPts val="600"/>
-              </a:spcAft>
-            </a:pPr>
-            <a:r>
-              <a:rPr sz="1500">
-                <a:solidFill>
-                  <a:srgbClr val="22282E"/>
-                </a:solidFill>
-              </a:rPr>
-              <a:t>•  Escribe la plantilla de un blameless post-mortem.</a:t>
-            </a:r>
-          </a:p>
-          <a:p>
-            <a:pPr>
-              <a:spcAft>
-                <a:spcPts val="600"/>
-              </a:spcAft>
-            </a:pPr>
-            <a:r>
-              <a:rPr sz="1500">
-                <a:solidFill>
-                  <a:srgbClr val="22282E"/>
-                </a:solidFill>
-              </a:rPr>
-              <a:t>•  Propón 5 métricas para demostrar el valor del programa a dirección.</a:t>
+              <a:t>•  Security champion: desarrollador de un equipo que actúa como enlace y referente de seguridad. Característica: no es experto full-time; es un multiplicador dentro de su equipo.</a:t>
+            </a:r>
+          </a:p>
+          <a:p>
+            <a:pPr>
+              <a:spcAft>
+                <a:spcPts val="600"/>
+              </a:spcAft>
+            </a:pPr>
+            <a:r>
+              <a:rPr sz="1500">
+                <a:solidFill>
+                  <a:srgbClr val="22282E"/>
+                </a:solidFill>
+              </a:rPr>
+              <a:t>•  Modelo hub-and-spoke: equipo central de AppSec (hub) conectado a champions distribuidos (spokes). Característica: escala el conocimiento sin centralizar la ejecución.</a:t>
+            </a:r>
+          </a:p>
+          <a:p>
+            <a:pPr>
+              <a:spcAft>
+                <a:spcPts val="600"/>
+              </a:spcAft>
+            </a:pPr>
+            <a:r>
+              <a:rPr sz="1500">
+                <a:solidFill>
+                  <a:srgbClr val="22282E"/>
+                </a:solidFill>
+              </a:rPr>
+              <a:t>•  Blameless post-mortem: análisis de incidentes centrado en el sistema, no en culpables. Característica: fomenta reportar en vez de ocultar.</a:t>
+            </a:r>
+          </a:p>
+          <a:p>
+            <a:pPr>
+              <a:spcAft>
+                <a:spcPts val="600"/>
+              </a:spcAft>
+            </a:pPr>
+            <a:r>
+              <a:rPr sz="1500">
+                <a:solidFill>
+                  <a:srgbClr val="22282E"/>
+                </a:solidFill>
+              </a:rPr>
+              <a:t>•  Cuello de botella de AppSec: el equipo de seguridad como único ejecutor y aprobador. Característica: frena entregas; se resuelve delegando y automatizando.</a:t>
+            </a:r>
+          </a:p>
+          <a:p>
+            <a:pPr>
+              <a:spcAft>
+                <a:spcPts val="600"/>
+              </a:spcAft>
+            </a:pPr>
+            <a:r>
+              <a:rPr sz="1500">
+                <a:solidFill>
+                  <a:srgbClr val="22282E"/>
+                </a:solidFill>
+              </a:rPr>
+              <a:t>•  Gamificación: usar mecánicas de juego (puntos, retos, ligas) para formar. Característica: sostiene el interés en la práctica de seguridad.</a:t>
+            </a:r>
+          </a:p>
+          <a:p>
+            <a:pPr>
+              <a:spcAft>
+                <a:spcPts val="600"/>
+              </a:spcAft>
+            </a:pPr>
+            <a:r>
+              <a:rPr sz="1500">
+                <a:solidFill>
+                  <a:srgbClr val="22282E"/>
+                </a:solidFill>
+              </a:rPr>
+              <a:t>•  Madurez cultural: grado en que la seguridad es responsabilidad compartida y natural. Característica: medible con SAMM y encuestas.</a:t>
             </a:r>
           </a:p>
         </p:txBody>
@@ -4823,7 +5319,7 @@
                   <a:srgbClr val="0B3D2E"/>
                 </a:solidFill>
               </a:rPr>
-              <a:t>📝 Reto verificable</a:t>
+              <a:t>🧰 Herramientas y preparación</a:t>
             </a:r>
           </a:p>
         </p:txBody>
@@ -4861,67 +5357,67 @@
                   <a:srgbClr val="22282E"/>
                 </a:solidFill>
               </a:rPr>
-              <a:t>•  Diseña un programa de security champions completo listo para presentar a dirección.</a:t>
-            </a:r>
-          </a:p>
-          <a:p>
-            <a:pPr>
-              <a:spcAft>
-                <a:spcPts val="600"/>
-              </a:spcAft>
-            </a:pPr>
-            <a:r>
-              <a:rPr sz="1500">
-                <a:solidFill>
-                  <a:srgbClr val="22282E"/>
-                </a:solidFill>
-              </a:rPr>
-              <a:t>•  Criterio de aceptación: el programa incluye (a) charter con objetivo, selección voluntaria</a:t>
-            </a:r>
-          </a:p>
-          <a:p>
-            <a:pPr>
-              <a:spcAft>
-                <a:spcPts val="600"/>
-              </a:spcAft>
-            </a:pPr>
-            <a:r>
-              <a:rPr sz="1500">
-                <a:solidFill>
-                  <a:srgbClr val="22282E"/>
-                </a:solidFill>
-              </a:rPr>
-              <a:t>•  y tiempo asignado; (b) modelo hub-and-spoke con ritmos de comunicación definidos; (c) plan de</a:t>
-            </a:r>
-          </a:p>
-          <a:p>
-            <a:pPr>
-              <a:spcAft>
-                <a:spcPts val="600"/>
-              </a:spcAft>
-            </a:pPr>
-            <a:r>
-              <a:rPr sz="1500">
-                <a:solidFill>
-                  <a:srgbClr val="22282E"/>
-                </a:solidFill>
-              </a:rPr>
-              <a:t>•  formación con actividad práctica (CTF/katas); (d) esquema de incentivos y reconocimiento</a:t>
-            </a:r>
-          </a:p>
-          <a:p>
-            <a:pPr>
-              <a:spcAft>
-                <a:spcPts val="600"/>
-              </a:spcAft>
-            </a:pPr>
-            <a:r>
-              <a:rPr sz="1500">
-                <a:solidFill>
-                  <a:srgbClr val="22282E"/>
-                </a:solidFill>
-              </a:rPr>
-              <a:t>•  concreto; y (e) un cuadro de 4–5 métricas para medir madurez y valor, alineadas con OWASP SAMM.</a:t>
+              <a:t>•  Clase organizativa; el "laboratorio" es de diseño de programa. Recursos útiles:</a:t>
+            </a:r>
+          </a:p>
+          <a:p>
+            <a:pPr>
+              <a:spcAft>
+                <a:spcPts val="600"/>
+              </a:spcAft>
+            </a:pPr>
+            <a:r>
+              <a:rPr sz="1500">
+                <a:solidFill>
+                  <a:srgbClr val="22282E"/>
+                </a:solidFill>
+              </a:rPr>
+              <a:t>•  OWASP Security Champions Guide y OWASP SAMM (práctica "Education &amp; Guidance").</a:t>
+            </a:r>
+          </a:p>
+          <a:p>
+            <a:pPr>
+              <a:spcAft>
+                <a:spcPts val="600"/>
+              </a:spcAft>
+            </a:pPr>
+            <a:r>
+              <a:rPr sz="1500">
+                <a:solidFill>
+                  <a:srgbClr val="22282E"/>
+                </a:solidFill>
+              </a:rPr>
+              <a:t>•  Plataformas de formación práctica: OWASP Juice Shop para CTF internos, Secure Code Warrior o katas de seguridad.</a:t>
+            </a:r>
+          </a:p>
+          <a:p>
+            <a:pPr>
+              <a:spcAft>
+                <a:spcPts val="600"/>
+              </a:spcAft>
+            </a:pPr>
+            <a:r>
+              <a:rPr sz="1500">
+                <a:solidFill>
+                  <a:srgbClr val="22282E"/>
+                </a:solidFill>
+              </a:rPr>
+              <a:t>•  Una plantilla de charter de programa (objetivos, roles, tiempo asignado, métricas).</a:t>
+            </a:r>
+          </a:p>
+          <a:p>
+            <a:pPr>
+              <a:spcAft>
+                <a:spcPts val="600"/>
+              </a:spcAft>
+            </a:pPr>
+            <a:r>
+              <a:rPr sz="1500">
+                <a:solidFill>
+                  <a:srgbClr val="22282E"/>
+                </a:solidFill>
+              </a:rPr>
+              <a:t>•  Herramienta de encuesta para medir percepción de seguridad en los equipos.</a:t>
             </a:r>
           </a:p>
         </p:txBody>
